--- a/slides/dist/WOSAC_Research_Plan2.pptx
+++ b/slides/dist/WOSAC_Research_Plan2.pptx
@@ -11440,7 +11440,7 @@
         </p:nvSpPr>
         <p:spPr>
           <a:xfrm>
-            <a:off x="548640" y="5486400"/>
+            <a:off x="548640" y="5753100"/>
             <a:ext cx="11094415" cy="731520"/>
           </a:xfrm>
           <a:prstGeom prst="rect">
@@ -11474,7 +11474,7 @@
         </p:nvSpPr>
         <p:spPr>
           <a:xfrm>
-            <a:off x="777240" y="5532120"/>
+            <a:off x="777240" y="5798820"/>
             <a:ext cx="10637215" cy="640080"/>
           </a:xfrm>
           <a:prstGeom prst="rect">
